--- a/Calendario2026/Presentaciones/6_RedesInalambricas.pptx
+++ b/Calendario2026/Presentaciones/6_RedesInalambricas.pptx
@@ -150,6 +150,58 @@
 </p:presentation>
 </file>
 
+<file path=ppt/revisionInfo.xml><?xml version="1.0" encoding="utf-8"?>
+<p1510:revInfo xmlns:a="http://schemas.openxmlformats.org/drawingml/2006/main" xmlns:r="http://schemas.openxmlformats.org/officeDocument/2006/relationships" xmlns:p1510="http://schemas.microsoft.com/office/powerpoint/2015/10/main">
+  <p1510:revLst>
+    <p1510:client id="{CFCE77FB-B440-4E97-B1C5-932A54CDD8E3}" v="10" dt="2026-02-10T21:58:16.395"/>
+  </p1510:revLst>
+</p1510:revInfo>
+</file>
+
+<file path=ppt/changesInfos/changesInfo1.xml><?xml version="1.0" encoding="utf-8"?>
+<pc:chgInfo xmlns:a="http://schemas.openxmlformats.org/drawingml/2006/main" xmlns:r="http://schemas.openxmlformats.org/officeDocument/2006/relationships" xmlns:ac="http://schemas.microsoft.com/office/drawing/2013/main/command" xmlns:pc="http://schemas.microsoft.com/office/powerpoint/2013/main/command">
+  <pc:docChgLst>
+    <pc:chgData name="Lizethe Pérez Fuertes" userId="4ae9ef87-2a7d-42f8-8dfa-0a501a9e2ff4" providerId="ADAL" clId="{FDDD45CB-1330-4033-A842-3D2746AFF7C7}"/>
+    <pc:docChg chg="modSld">
+      <pc:chgData name="Lizethe Pérez Fuertes" userId="4ae9ef87-2a7d-42f8-8dfa-0a501a9e2ff4" providerId="ADAL" clId="{FDDD45CB-1330-4033-A842-3D2746AFF7C7}" dt="2026-02-10T21:58:16.395" v="9" actId="6549"/>
+      <pc:docMkLst>
+        <pc:docMk/>
+      </pc:docMkLst>
+      <pc:sldChg chg="modSp">
+        <pc:chgData name="Lizethe Pérez Fuertes" userId="4ae9ef87-2a7d-42f8-8dfa-0a501a9e2ff4" providerId="ADAL" clId="{FDDD45CB-1330-4033-A842-3D2746AFF7C7}" dt="2026-02-10T21:49:01.578" v="3" actId="207"/>
+        <pc:sldMkLst>
+          <pc:docMk/>
+          <pc:sldMk cId="1363485696" sldId="857"/>
+        </pc:sldMkLst>
+        <pc:spChg chg="mod">
+          <ac:chgData name="Lizethe Pérez Fuertes" userId="4ae9ef87-2a7d-42f8-8dfa-0a501a9e2ff4" providerId="ADAL" clId="{FDDD45CB-1330-4033-A842-3D2746AFF7C7}" dt="2026-02-10T21:49:01.578" v="3" actId="207"/>
+          <ac:spMkLst>
+            <pc:docMk/>
+            <pc:sldMk cId="1363485696" sldId="857"/>
+            <ac:spMk id="7" creationId="{81B15081-762F-4B85-82C8-46A3C9FC4613}"/>
+          </ac:spMkLst>
+        </pc:spChg>
+      </pc:sldChg>
+      <pc:sldChg chg="modSp">
+        <pc:chgData name="Lizethe Pérez Fuertes" userId="4ae9ef87-2a7d-42f8-8dfa-0a501a9e2ff4" providerId="ADAL" clId="{FDDD45CB-1330-4033-A842-3D2746AFF7C7}" dt="2026-02-10T21:58:16.395" v="9" actId="6549"/>
+        <pc:sldMkLst>
+          <pc:docMk/>
+          <pc:sldMk cId="1418419281" sldId="866"/>
+        </pc:sldMkLst>
+        <pc:spChg chg="mod">
+          <ac:chgData name="Lizethe Pérez Fuertes" userId="4ae9ef87-2a7d-42f8-8dfa-0a501a9e2ff4" providerId="ADAL" clId="{FDDD45CB-1330-4033-A842-3D2746AFF7C7}" dt="2026-02-10T21:58:16.395" v="9" actId="6549"/>
+          <ac:spMkLst>
+            <pc:docMk/>
+            <pc:sldMk cId="1418419281" sldId="866"/>
+            <ac:spMk id="4" creationId="{0D11DBEE-143D-4D0C-CBB7-6545A70103E8}"/>
+          </ac:spMkLst>
+        </pc:spChg>
+      </pc:sldChg>
+    </pc:docChg>
+  </pc:docChgLst>
+</pc:chgInfo>
+</file>
+
 <file path=ppt/handoutMasters/handoutMaster1.xml><?xml version="1.0" encoding="utf-8"?>
 <p:handoutMaster xmlns:a="http://schemas.openxmlformats.org/drawingml/2006/main" xmlns:r="http://schemas.openxmlformats.org/officeDocument/2006/relationships" xmlns:p="http://schemas.openxmlformats.org/presentationml/2006/main">
   <p:cSld>
@@ -232,7 +284,7 @@
           <a:p>
             <a:fld id="{CFD15F0F-6D28-499C-8425-A9347399C9A5}" type="datetimeFigureOut">
               <a:rPr lang="es-MX" smtClean="0"/>
-              <a:t>30/10/2024</a:t>
+              <a:t>10/02/2026</a:t>
             </a:fld>
             <a:endParaRPr lang="es-MX" dirty="0"/>
           </a:p>
@@ -298,7 +350,7 @@
           <a:p>
             <a:fld id="{2C524254-95EA-43C3-A456-75717B602892}" type="slidenum">
               <a:rPr lang="es-MX" smtClean="0"/>
-              <a:t>‹#›</a:t>
+              <a:t>‹Nº›</a:t>
             </a:fld>
             <a:endParaRPr lang="es-MX" dirty="0"/>
           </a:p>
@@ -397,7 +449,7 @@
           <a:p>
             <a:fld id="{2D445F07-8756-451B-A938-0248325FC7BB}" type="datetimeFigureOut">
               <a:rPr lang="es-MX" smtClean="0"/>
-              <a:t>30/10/2024</a:t>
+              <a:t>10/02/2026</a:t>
             </a:fld>
             <a:endParaRPr lang="es-MX" dirty="0"/>
           </a:p>
@@ -556,7 +608,7 @@
           <a:p>
             <a:fld id="{5993AEC0-242E-4FA7-9D3C-51E1036AC3CB}" type="slidenum">
               <a:rPr lang="es-MX" smtClean="0"/>
-              <a:t>‹#›</a:t>
+              <a:t>‹Nº›</a:t>
             </a:fld>
             <a:endParaRPr lang="es-MX" dirty="0"/>
           </a:p>
@@ -2418,7 +2470,7 @@
           <a:p>
             <a:fld id="{5E75A0DC-66C6-4CEC-A5EB-F8C97CEC3796}" type="datetimeFigureOut">
               <a:rPr lang="es-MX" smtClean="0"/>
-              <a:t>30/10/2024</a:t>
+              <a:t>10/02/2026</a:t>
             </a:fld>
             <a:endParaRPr lang="es-MX" dirty="0"/>
           </a:p>
@@ -2460,7 +2512,7 @@
           <a:p>
             <a:fld id="{C077EE1E-7A06-4E7F-9AFB-189FC69B7B0C}" type="slidenum">
               <a:rPr lang="es-MX" smtClean="0"/>
-              <a:t>‹#›</a:t>
+              <a:t>‹Nº›</a:t>
             </a:fld>
             <a:endParaRPr lang="es-MX" dirty="0"/>
           </a:p>
@@ -2588,7 +2640,7 @@
           <a:p>
             <a:fld id="{5E75A0DC-66C6-4CEC-A5EB-F8C97CEC3796}" type="datetimeFigureOut">
               <a:rPr lang="es-MX" smtClean="0"/>
-              <a:t>30/10/2024</a:t>
+              <a:t>10/02/2026</a:t>
             </a:fld>
             <a:endParaRPr lang="es-MX" dirty="0"/>
           </a:p>
@@ -2630,7 +2682,7 @@
           <a:p>
             <a:fld id="{C077EE1E-7A06-4E7F-9AFB-189FC69B7B0C}" type="slidenum">
               <a:rPr lang="es-MX" smtClean="0"/>
-              <a:t>‹#›</a:t>
+              <a:t>‹Nº›</a:t>
             </a:fld>
             <a:endParaRPr lang="es-MX" dirty="0"/>
           </a:p>
@@ -2768,7 +2820,7 @@
           <a:p>
             <a:fld id="{5E75A0DC-66C6-4CEC-A5EB-F8C97CEC3796}" type="datetimeFigureOut">
               <a:rPr lang="es-MX" smtClean="0"/>
-              <a:t>30/10/2024</a:t>
+              <a:t>10/02/2026</a:t>
             </a:fld>
             <a:endParaRPr lang="es-MX" dirty="0"/>
           </a:p>
@@ -2810,7 +2862,7 @@
           <a:p>
             <a:fld id="{C077EE1E-7A06-4E7F-9AFB-189FC69B7B0C}" type="slidenum">
               <a:rPr lang="es-MX" smtClean="0"/>
-              <a:t>‹#›</a:t>
+              <a:t>‹Nº›</a:t>
             </a:fld>
             <a:endParaRPr lang="es-MX" dirty="0"/>
           </a:p>
@@ -2889,7 +2941,7 @@
               <a:pPr defTabSz="385763">
                 <a:defRPr/>
               </a:pPr>
-              <a:t>‹#›</a:t>
+              <a:t>‹Nº›</a:t>
             </a:fld>
             <a:endParaRPr lang="en-US" kern="0" dirty="0">
               <a:solidFill>
@@ -3243,7 +3295,7 @@
           <a:p>
             <a:fld id="{5E75A0DC-66C6-4CEC-A5EB-F8C97CEC3796}" type="datetimeFigureOut">
               <a:rPr lang="es-MX" smtClean="0"/>
-              <a:t>30/10/2024</a:t>
+              <a:t>10/02/2026</a:t>
             </a:fld>
             <a:endParaRPr lang="es-MX" dirty="0"/>
           </a:p>
@@ -3285,7 +3337,7 @@
           <a:p>
             <a:fld id="{C077EE1E-7A06-4E7F-9AFB-189FC69B7B0C}" type="slidenum">
               <a:rPr lang="es-MX" smtClean="0"/>
-              <a:t>‹#›</a:t>
+              <a:t>‹Nº›</a:t>
             </a:fld>
             <a:endParaRPr lang="es-MX" dirty="0"/>
           </a:p>
@@ -3489,7 +3541,7 @@
           <a:p>
             <a:fld id="{5E75A0DC-66C6-4CEC-A5EB-F8C97CEC3796}" type="datetimeFigureOut">
               <a:rPr lang="es-MX" smtClean="0"/>
-              <a:t>30/10/2024</a:t>
+              <a:t>10/02/2026</a:t>
             </a:fld>
             <a:endParaRPr lang="es-MX" dirty="0"/>
           </a:p>
@@ -3531,7 +3583,7 @@
           <a:p>
             <a:fld id="{C077EE1E-7A06-4E7F-9AFB-189FC69B7B0C}" type="slidenum">
               <a:rPr lang="es-MX" smtClean="0"/>
-              <a:t>‹#›</a:t>
+              <a:t>‹Nº›</a:t>
             </a:fld>
             <a:endParaRPr lang="es-MX" dirty="0"/>
           </a:p>
@@ -3777,7 +3829,7 @@
           <a:p>
             <a:fld id="{5E75A0DC-66C6-4CEC-A5EB-F8C97CEC3796}" type="datetimeFigureOut">
               <a:rPr lang="es-MX" smtClean="0"/>
-              <a:t>30/10/2024</a:t>
+              <a:t>10/02/2026</a:t>
             </a:fld>
             <a:endParaRPr lang="es-MX" dirty="0"/>
           </a:p>
@@ -3819,7 +3871,7 @@
           <a:p>
             <a:fld id="{C077EE1E-7A06-4E7F-9AFB-189FC69B7B0C}" type="slidenum">
               <a:rPr lang="es-MX" smtClean="0"/>
-              <a:t>‹#›</a:t>
+              <a:t>‹Nº›</a:t>
             </a:fld>
             <a:endParaRPr lang="es-MX" dirty="0"/>
           </a:p>
@@ -4199,7 +4251,7 @@
           <a:p>
             <a:fld id="{5E75A0DC-66C6-4CEC-A5EB-F8C97CEC3796}" type="datetimeFigureOut">
               <a:rPr lang="es-MX" smtClean="0"/>
-              <a:t>30/10/2024</a:t>
+              <a:t>10/02/2026</a:t>
             </a:fld>
             <a:endParaRPr lang="es-MX" dirty="0"/>
           </a:p>
@@ -4241,7 +4293,7 @@
           <a:p>
             <a:fld id="{C077EE1E-7A06-4E7F-9AFB-189FC69B7B0C}" type="slidenum">
               <a:rPr lang="es-MX" smtClean="0"/>
-              <a:t>‹#›</a:t>
+              <a:t>‹Nº›</a:t>
             </a:fld>
             <a:endParaRPr lang="es-MX" dirty="0"/>
           </a:p>
@@ -4317,7 +4369,7 @@
           <a:p>
             <a:fld id="{5E75A0DC-66C6-4CEC-A5EB-F8C97CEC3796}" type="datetimeFigureOut">
               <a:rPr lang="es-MX" smtClean="0"/>
-              <a:t>30/10/2024</a:t>
+              <a:t>10/02/2026</a:t>
             </a:fld>
             <a:endParaRPr lang="es-MX" dirty="0"/>
           </a:p>
@@ -4359,7 +4411,7 @@
           <a:p>
             <a:fld id="{C077EE1E-7A06-4E7F-9AFB-189FC69B7B0C}" type="slidenum">
               <a:rPr lang="es-MX" smtClean="0"/>
-              <a:t>‹#›</a:t>
+              <a:t>‹Nº›</a:t>
             </a:fld>
             <a:endParaRPr lang="es-MX" dirty="0"/>
           </a:p>
@@ -4412,7 +4464,7 @@
           <a:p>
             <a:fld id="{5E75A0DC-66C6-4CEC-A5EB-F8C97CEC3796}" type="datetimeFigureOut">
               <a:rPr lang="es-MX" smtClean="0"/>
-              <a:t>30/10/2024</a:t>
+              <a:t>10/02/2026</a:t>
             </a:fld>
             <a:endParaRPr lang="es-MX" dirty="0"/>
           </a:p>
@@ -4454,7 +4506,7 @@
           <a:p>
             <a:fld id="{C077EE1E-7A06-4E7F-9AFB-189FC69B7B0C}" type="slidenum">
               <a:rPr lang="es-MX" smtClean="0"/>
-              <a:t>‹#›</a:t>
+              <a:t>‹Nº›</a:t>
             </a:fld>
             <a:endParaRPr lang="es-MX" dirty="0"/>
           </a:p>
@@ -4689,7 +4741,7 @@
           <a:p>
             <a:fld id="{5E75A0DC-66C6-4CEC-A5EB-F8C97CEC3796}" type="datetimeFigureOut">
               <a:rPr lang="es-MX" smtClean="0"/>
-              <a:t>30/10/2024</a:t>
+              <a:t>10/02/2026</a:t>
             </a:fld>
             <a:endParaRPr lang="es-MX" dirty="0"/>
           </a:p>
@@ -4731,7 +4783,7 @@
           <a:p>
             <a:fld id="{C077EE1E-7A06-4E7F-9AFB-189FC69B7B0C}" type="slidenum">
               <a:rPr lang="es-MX" smtClean="0"/>
-              <a:t>‹#›</a:t>
+              <a:t>‹Nº›</a:t>
             </a:fld>
             <a:endParaRPr lang="es-MX" dirty="0"/>
           </a:p>
@@ -4942,7 +4994,7 @@
           <a:p>
             <a:fld id="{5E75A0DC-66C6-4CEC-A5EB-F8C97CEC3796}" type="datetimeFigureOut">
               <a:rPr lang="es-MX" smtClean="0"/>
-              <a:t>30/10/2024</a:t>
+              <a:t>10/02/2026</a:t>
             </a:fld>
             <a:endParaRPr lang="es-MX" dirty="0"/>
           </a:p>
@@ -4984,7 +5036,7 @@
           <a:p>
             <a:fld id="{C077EE1E-7A06-4E7F-9AFB-189FC69B7B0C}" type="slidenum">
               <a:rPr lang="es-MX" smtClean="0"/>
-              <a:t>‹#›</a:t>
+              <a:t>‹Nº›</a:t>
             </a:fld>
             <a:endParaRPr lang="es-MX" dirty="0"/>
           </a:p>
@@ -5155,7 +5207,7 @@
           <a:p>
             <a:fld id="{5E75A0DC-66C6-4CEC-A5EB-F8C97CEC3796}" type="datetimeFigureOut">
               <a:rPr lang="es-MX" smtClean="0"/>
-              <a:t>30/10/2024</a:t>
+              <a:t>10/02/2026</a:t>
             </a:fld>
             <a:endParaRPr lang="es-MX" dirty="0"/>
           </a:p>
@@ -5233,7 +5285,7 @@
           <a:p>
             <a:fld id="{C077EE1E-7A06-4E7F-9AFB-189FC69B7B0C}" type="slidenum">
               <a:rPr lang="es-MX" smtClean="0"/>
-              <a:t>‹#›</a:t>
+              <a:t>‹Nº›</a:t>
             </a:fld>
             <a:endParaRPr lang="es-MX" dirty="0"/>
           </a:p>
@@ -5893,7 +5945,7 @@
         <p:spPr>
           <a:xfrm>
             <a:off x="539552" y="1556792"/>
-            <a:ext cx="7992888" cy="3312368"/>
+            <a:ext cx="8064896" cy="2448272"/>
           </a:xfrm>
         </p:spPr>
         <p:txBody>
@@ -5922,20 +5974,32 @@
               <a:t>Las señales </a:t>
             </a:r>
             <a:r>
-              <a:rPr lang="es-ES" sz="1600" dirty="0" err="1">
+              <a:rPr lang="es-ES" sz="1600" b="1" dirty="0" err="1">
+                <a:solidFill>
+                  <a:schemeClr val="accent6">
+                    <a:lumMod val="75000"/>
+                  </a:schemeClr>
+                </a:solidFill>
+              </a:rPr>
+              <a:t>Wi</a:t>
+            </a:r>
+            <a:r>
+              <a:rPr lang="es-ES" sz="1600" b="1" dirty="0">
+                <a:solidFill>
+                  <a:schemeClr val="accent6">
+                    <a:lumMod val="75000"/>
+                  </a:schemeClr>
+                </a:solidFill>
+              </a:rPr>
+              <a:t>-Fi </a:t>
+            </a:r>
+            <a:r>
+              <a:rPr lang="es-ES" sz="1600" dirty="0">
                 <a:solidFill>
                   <a:srgbClr val="333333"/>
                 </a:solidFill>
               </a:rPr>
-              <a:t>Wi</a:t>
-            </a:r>
-            <a:r>
-              <a:rPr lang="es-ES" sz="1600" dirty="0">
-                <a:solidFill>
-                  <a:srgbClr val="333333"/>
-                </a:solidFill>
-              </a:rPr>
-              <a:t>-Fi se propagan por medio de la emisión de </a:t>
+              <a:t>se propagan por medio de la emisión de </a:t>
             </a:r>
             <a:r>
               <a:rPr lang="es-ES" sz="1600" b="1" dirty="0">
@@ -6006,18 +6070,30 @@
             <a:r>
               <a:rPr lang="es-ES" sz="1600" b="1" dirty="0">
                 <a:solidFill>
+                  <a:schemeClr val="accent6">
+                    <a:lumMod val="75000"/>
+                  </a:schemeClr>
+                </a:solidFill>
+              </a:rPr>
+              <a:t>ondas electromagnéticas</a:t>
+            </a:r>
+            <a:r>
+              <a:rPr lang="es-ES" sz="1600" dirty="0">
+                <a:solidFill>
+                  <a:schemeClr val="accent6">
+                    <a:lumMod val="75000"/>
+                  </a:schemeClr>
+                </a:solidFill>
+              </a:rPr>
+              <a:t> </a:t>
+            </a:r>
+            <a:r>
+              <a:rPr lang="es-ES" sz="1600" dirty="0">
+                <a:solidFill>
                   <a:srgbClr val="333333"/>
                 </a:solidFill>
               </a:rPr>
-              <a:t>ondas electromagnéticas</a:t>
-            </a:r>
-            <a:r>
-              <a:rPr lang="es-ES" sz="1600" dirty="0">
-                <a:solidFill>
-                  <a:srgbClr val="333333"/>
-                </a:solidFill>
-              </a:rPr>
-              <a:t> que permiten a los dispositivos conectarse a Internet. </a:t>
+              <a:t>que permiten a los dispositivos conectarse a Internet. </a:t>
             </a:r>
             <a:endParaRPr lang="es-ES" altLang="es-MX" sz="1600" dirty="0"/>
           </a:p>
@@ -8381,7 +8457,15 @@
             </a:r>
             <a:r>
               <a:rPr lang="es-MX" sz="1600" dirty="0"/>
-              <a:t>que opera desde los 2.484 GHz hasta los 2.495 GHz.</a:t>
+              <a:t>que opera desde </a:t>
+            </a:r>
+            <a:r>
+              <a:rPr lang="es-MX" sz="1600"/>
+              <a:t>los 2.473 </a:t>
+            </a:r>
+            <a:r>
+              <a:rPr lang="es-MX" sz="1600" dirty="0"/>
+              <a:t>GHz hasta los 2.495 GHz.</a:t>
             </a:r>
           </a:p>
           <a:p>

--- a/Calendario2026/Presentaciones/6_RedesInalambricas.pptx
+++ b/Calendario2026/Presentaciones/6_RedesInalambricas.pptx
@@ -153,7 +153,7 @@
 <file path=ppt/revisionInfo.xml><?xml version="1.0" encoding="utf-8"?>
 <p1510:revInfo xmlns:a="http://schemas.openxmlformats.org/drawingml/2006/main" xmlns:r="http://schemas.openxmlformats.org/officeDocument/2006/relationships" xmlns:p1510="http://schemas.microsoft.com/office/powerpoint/2015/10/main">
   <p1510:revLst>
-    <p1510:client id="{CFCE77FB-B440-4E97-B1C5-932A54CDD8E3}" v="10" dt="2026-02-10T21:58:16.395"/>
+    <p1510:client id="{299033E1-C419-4A12-AFC5-497BEE30AF1F}" v="11" dt="2026-05-13T18:32:29.455"/>
   </p1510:revLst>
 </p1510:revInfo>
 </file>
@@ -163,39 +163,40 @@
   <pc:docChgLst>
     <pc:chgData name="Lizethe Pérez Fuertes" userId="4ae9ef87-2a7d-42f8-8dfa-0a501a9e2ff4" providerId="ADAL" clId="{FDDD45CB-1330-4033-A842-3D2746AFF7C7}"/>
     <pc:docChg chg="modSld">
-      <pc:chgData name="Lizethe Pérez Fuertes" userId="4ae9ef87-2a7d-42f8-8dfa-0a501a9e2ff4" providerId="ADAL" clId="{FDDD45CB-1330-4033-A842-3D2746AFF7C7}" dt="2026-02-10T21:58:16.395" v="9" actId="6549"/>
+      <pc:chgData name="Lizethe Pérez Fuertes" userId="4ae9ef87-2a7d-42f8-8dfa-0a501a9e2ff4" providerId="ADAL" clId="{FDDD45CB-1330-4033-A842-3D2746AFF7C7}" dt="2026-05-13T18:33:17.506" v="17" actId="1076"/>
       <pc:docMkLst>
         <pc:docMk/>
       </pc:docMkLst>
-      <pc:sldChg chg="modSp">
-        <pc:chgData name="Lizethe Pérez Fuertes" userId="4ae9ef87-2a7d-42f8-8dfa-0a501a9e2ff4" providerId="ADAL" clId="{FDDD45CB-1330-4033-A842-3D2746AFF7C7}" dt="2026-02-10T21:49:01.578" v="3" actId="207"/>
+      <pc:sldChg chg="modSp mod">
+        <pc:chgData name="Lizethe Pérez Fuertes" userId="4ae9ef87-2a7d-42f8-8dfa-0a501a9e2ff4" providerId="ADAL" clId="{FDDD45CB-1330-4033-A842-3D2746AFF7C7}" dt="2026-05-13T18:33:17.506" v="17" actId="1076"/>
         <pc:sldMkLst>
           <pc:docMk/>
-          <pc:sldMk cId="1363485696" sldId="857"/>
+          <pc:sldMk cId="2925606516" sldId="858"/>
         </pc:sldMkLst>
         <pc:spChg chg="mod">
-          <ac:chgData name="Lizethe Pérez Fuertes" userId="4ae9ef87-2a7d-42f8-8dfa-0a501a9e2ff4" providerId="ADAL" clId="{FDDD45CB-1330-4033-A842-3D2746AFF7C7}" dt="2026-02-10T21:49:01.578" v="3" actId="207"/>
+          <ac:chgData name="Lizethe Pérez Fuertes" userId="4ae9ef87-2a7d-42f8-8dfa-0a501a9e2ff4" providerId="ADAL" clId="{FDDD45CB-1330-4033-A842-3D2746AFF7C7}" dt="2026-05-13T18:32:29.453" v="16" actId="14100"/>
           <ac:spMkLst>
             <pc:docMk/>
-            <pc:sldMk cId="1363485696" sldId="857"/>
-            <ac:spMk id="7" creationId="{81B15081-762F-4B85-82C8-46A3C9FC4613}"/>
+            <pc:sldMk cId="2925606516" sldId="858"/>
+            <ac:spMk id="8" creationId="{5B9A2CDA-3CF6-4395-BD8D-C8982D44F9AB}"/>
           </ac:spMkLst>
         </pc:spChg>
-      </pc:sldChg>
-      <pc:sldChg chg="modSp">
-        <pc:chgData name="Lizethe Pérez Fuertes" userId="4ae9ef87-2a7d-42f8-8dfa-0a501a9e2ff4" providerId="ADAL" clId="{FDDD45CB-1330-4033-A842-3D2746AFF7C7}" dt="2026-02-10T21:58:16.395" v="9" actId="6549"/>
-        <pc:sldMkLst>
-          <pc:docMk/>
-          <pc:sldMk cId="1418419281" sldId="866"/>
-        </pc:sldMkLst>
         <pc:spChg chg="mod">
-          <ac:chgData name="Lizethe Pérez Fuertes" userId="4ae9ef87-2a7d-42f8-8dfa-0a501a9e2ff4" providerId="ADAL" clId="{FDDD45CB-1330-4033-A842-3D2746AFF7C7}" dt="2026-02-10T21:58:16.395" v="9" actId="6549"/>
+          <ac:chgData name="Lizethe Pérez Fuertes" userId="4ae9ef87-2a7d-42f8-8dfa-0a501a9e2ff4" providerId="ADAL" clId="{FDDD45CB-1330-4033-A842-3D2746AFF7C7}" dt="2026-05-13T18:31:52.823" v="14" actId="1076"/>
           <ac:spMkLst>
             <pc:docMk/>
-            <pc:sldMk cId="1418419281" sldId="866"/>
-            <ac:spMk id="4" creationId="{0D11DBEE-143D-4D0C-CBB7-6545A70103E8}"/>
+            <pc:sldMk cId="2925606516" sldId="858"/>
+            <ac:spMk id="23" creationId="{E5E4886C-CE5A-D279-10DE-95523F1D663E}"/>
           </ac:spMkLst>
         </pc:spChg>
+        <pc:picChg chg="mod">
+          <ac:chgData name="Lizethe Pérez Fuertes" userId="4ae9ef87-2a7d-42f8-8dfa-0a501a9e2ff4" providerId="ADAL" clId="{FDDD45CB-1330-4033-A842-3D2746AFF7C7}" dt="2026-05-13T18:33:17.506" v="17" actId="1076"/>
+          <ac:picMkLst>
+            <pc:docMk/>
+            <pc:sldMk cId="2925606516" sldId="858"/>
+            <ac:picMk id="24" creationId="{6E72525A-EA2E-02F2-2ADA-1A5C473311F4}"/>
+          </ac:picMkLst>
+        </pc:picChg>
       </pc:sldChg>
     </pc:docChg>
   </pc:docChgLst>
@@ -284,7 +285,7 @@
           <a:p>
             <a:fld id="{CFD15F0F-6D28-499C-8425-A9347399C9A5}" type="datetimeFigureOut">
               <a:rPr lang="es-MX" smtClean="0"/>
-              <a:t>10/02/2026</a:t>
+              <a:t>13/05/2026</a:t>
             </a:fld>
             <a:endParaRPr lang="es-MX" dirty="0"/>
           </a:p>
@@ -449,7 +450,7 @@
           <a:p>
             <a:fld id="{2D445F07-8756-451B-A938-0248325FC7BB}" type="datetimeFigureOut">
               <a:rPr lang="es-MX" smtClean="0"/>
-              <a:t>10/02/2026</a:t>
+              <a:t>13/05/2026</a:t>
             </a:fld>
             <a:endParaRPr lang="es-MX" dirty="0"/>
           </a:p>
@@ -1759,6 +1760,10 @@
               <a:buFontTx/>
               <a:buNone/>
             </a:pPr>
+            <a:r>
+              <a:rPr lang="es-MX" dirty="0"/>
+              <a:t>Gestiona los datos de forma que los dispositivos que están lejos usen la cobertura de 2.4 GHz y los que están cerca aprovechen la velocidad de 5 GHz, todo bajo una misma red inteligente.</a:t>
+            </a:r>
             <a:endParaRPr lang="es-ES" dirty="0"/>
           </a:p>
         </p:txBody>
@@ -2470,7 +2475,7 @@
           <a:p>
             <a:fld id="{5E75A0DC-66C6-4CEC-A5EB-F8C97CEC3796}" type="datetimeFigureOut">
               <a:rPr lang="es-MX" smtClean="0"/>
-              <a:t>10/02/2026</a:t>
+              <a:t>13/05/2026</a:t>
             </a:fld>
             <a:endParaRPr lang="es-MX" dirty="0"/>
           </a:p>
@@ -2640,7 +2645,7 @@
           <a:p>
             <a:fld id="{5E75A0DC-66C6-4CEC-A5EB-F8C97CEC3796}" type="datetimeFigureOut">
               <a:rPr lang="es-MX" smtClean="0"/>
-              <a:t>10/02/2026</a:t>
+              <a:t>13/05/2026</a:t>
             </a:fld>
             <a:endParaRPr lang="es-MX" dirty="0"/>
           </a:p>
@@ -2820,7 +2825,7 @@
           <a:p>
             <a:fld id="{5E75A0DC-66C6-4CEC-A5EB-F8C97CEC3796}" type="datetimeFigureOut">
               <a:rPr lang="es-MX" smtClean="0"/>
-              <a:t>10/02/2026</a:t>
+              <a:t>13/05/2026</a:t>
             </a:fld>
             <a:endParaRPr lang="es-MX" dirty="0"/>
           </a:p>
@@ -3295,7 +3300,7 @@
           <a:p>
             <a:fld id="{5E75A0DC-66C6-4CEC-A5EB-F8C97CEC3796}" type="datetimeFigureOut">
               <a:rPr lang="es-MX" smtClean="0"/>
-              <a:t>10/02/2026</a:t>
+              <a:t>13/05/2026</a:t>
             </a:fld>
             <a:endParaRPr lang="es-MX" dirty="0"/>
           </a:p>
@@ -3541,7 +3546,7 @@
           <a:p>
             <a:fld id="{5E75A0DC-66C6-4CEC-A5EB-F8C97CEC3796}" type="datetimeFigureOut">
               <a:rPr lang="es-MX" smtClean="0"/>
-              <a:t>10/02/2026</a:t>
+              <a:t>13/05/2026</a:t>
             </a:fld>
             <a:endParaRPr lang="es-MX" dirty="0"/>
           </a:p>
@@ -3829,7 +3834,7 @@
           <a:p>
             <a:fld id="{5E75A0DC-66C6-4CEC-A5EB-F8C97CEC3796}" type="datetimeFigureOut">
               <a:rPr lang="es-MX" smtClean="0"/>
-              <a:t>10/02/2026</a:t>
+              <a:t>13/05/2026</a:t>
             </a:fld>
             <a:endParaRPr lang="es-MX" dirty="0"/>
           </a:p>
@@ -4251,7 +4256,7 @@
           <a:p>
             <a:fld id="{5E75A0DC-66C6-4CEC-A5EB-F8C97CEC3796}" type="datetimeFigureOut">
               <a:rPr lang="es-MX" smtClean="0"/>
-              <a:t>10/02/2026</a:t>
+              <a:t>13/05/2026</a:t>
             </a:fld>
             <a:endParaRPr lang="es-MX" dirty="0"/>
           </a:p>
@@ -4369,7 +4374,7 @@
           <a:p>
             <a:fld id="{5E75A0DC-66C6-4CEC-A5EB-F8C97CEC3796}" type="datetimeFigureOut">
               <a:rPr lang="es-MX" smtClean="0"/>
-              <a:t>10/02/2026</a:t>
+              <a:t>13/05/2026</a:t>
             </a:fld>
             <a:endParaRPr lang="es-MX" dirty="0"/>
           </a:p>
@@ -4464,7 +4469,7 @@
           <a:p>
             <a:fld id="{5E75A0DC-66C6-4CEC-A5EB-F8C97CEC3796}" type="datetimeFigureOut">
               <a:rPr lang="es-MX" smtClean="0"/>
-              <a:t>10/02/2026</a:t>
+              <a:t>13/05/2026</a:t>
             </a:fld>
             <a:endParaRPr lang="es-MX" dirty="0"/>
           </a:p>
@@ -4741,7 +4746,7 @@
           <a:p>
             <a:fld id="{5E75A0DC-66C6-4CEC-A5EB-F8C97CEC3796}" type="datetimeFigureOut">
               <a:rPr lang="es-MX" smtClean="0"/>
-              <a:t>10/02/2026</a:t>
+              <a:t>13/05/2026</a:t>
             </a:fld>
             <a:endParaRPr lang="es-MX" dirty="0"/>
           </a:p>
@@ -4994,7 +4999,7 @@
           <a:p>
             <a:fld id="{5E75A0DC-66C6-4CEC-A5EB-F8C97CEC3796}" type="datetimeFigureOut">
               <a:rPr lang="es-MX" smtClean="0"/>
-              <a:t>10/02/2026</a:t>
+              <a:t>13/05/2026</a:t>
             </a:fld>
             <a:endParaRPr lang="es-MX" dirty="0"/>
           </a:p>
@@ -5207,7 +5212,7 @@
           <a:p>
             <a:fld id="{5E75A0DC-66C6-4CEC-A5EB-F8C97CEC3796}" type="datetimeFigureOut">
               <a:rPr lang="es-MX" smtClean="0"/>
-              <a:t>10/02/2026</a:t>
+              <a:t>13/05/2026</a:t>
             </a:fld>
             <a:endParaRPr lang="es-MX" dirty="0"/>
           </a:p>
@@ -6391,8 +6396,8 @@
         </p:nvSpPr>
         <p:spPr bwMode="auto">
           <a:xfrm>
-            <a:off x="2339752" y="1238600"/>
-            <a:ext cx="6120680" cy="1674186"/>
+            <a:off x="2444392" y="1000392"/>
+            <a:ext cx="6520095" cy="1924552"/>
           </a:xfrm>
           <a:prstGeom prst="rect">
             <a:avLst/>
@@ -6629,6 +6634,12 @@
               <a:lnSpc>
                 <a:spcPct val="150000"/>
               </a:lnSpc>
+              <a:spcBef>
+                <a:spcPts val="0"/>
+              </a:spcBef>
+              <a:spcAft>
+                <a:spcPts val="0"/>
+              </a:spcAft>
               <a:buFont typeface="Arial" panose="020B0604020202020204" pitchFamily="34" charset="0"/>
               <a:buChar char="•"/>
             </a:pPr>
@@ -6655,6 +6666,25 @@
                 </a:solidFill>
               </a:rPr>
               <a:t>a la vez (con ello se aprovecha la cobertura de la red de 2,4 GHz y la velocidad de la red de 5 GHz.)</a:t>
+            </a:r>
+          </a:p>
+          <a:p>
+            <a:pPr algn="just">
+              <a:lnSpc>
+                <a:spcPct val="150000"/>
+              </a:lnSpc>
+              <a:spcBef>
+                <a:spcPts val="0"/>
+              </a:spcBef>
+              <a:spcAft>
+                <a:spcPts val="0"/>
+              </a:spcAft>
+              <a:buFont typeface="Arial" panose="020B0604020202020204" pitchFamily="34" charset="0"/>
+              <a:buChar char="•"/>
+            </a:pPr>
+            <a:r>
+              <a:rPr lang="es-MX" sz="1600" dirty="0"/>
+              <a:t>Gestiona los datos de forma que los dispositivos que están lejos usen la cobertura de 2.4 GHz y los que están cerca aprovechen la velocidad de 5 GHz, todo bajo una misma red.</a:t>
             </a:r>
             <a:endParaRPr lang="es-ES" altLang="es-MX" sz="1600" b="1" dirty="0">
               <a:solidFill>
@@ -6727,7 +6757,7 @@
         </p:nvSpPr>
         <p:spPr bwMode="auto">
           <a:xfrm>
-            <a:off x="611560" y="2708920"/>
+            <a:off x="494674" y="3158195"/>
             <a:ext cx="7920880" cy="2232248"/>
           </a:xfrm>
           <a:prstGeom prst="rect">
@@ -7191,7 +7221,7 @@
         </p:blipFill>
         <p:spPr>
           <a:xfrm>
-            <a:off x="3864486" y="4725144"/>
+            <a:off x="4053380" y="4661418"/>
             <a:ext cx="4595946" cy="1924552"/>
           </a:xfrm>
           <a:prstGeom prst="rect">
